--- a/assets/powerpoints/module-n2-couloirs/C1-a-gauche-ou-a-droite.pptx
+++ b/assets/powerpoints/module-n2-couloirs/C1-a-gauche-ou-a-droite.pptx
@@ -10594,13 +10594,40 @@
               </a:lnSpc>
             </a:pPr>
             <a:r>
+              <a:rPr sz="2000" b="1" i="0">
+                <a:solidFill>
+                  <a:srgbClr val="4B4F52"/>
+                </a:solidFill>
+                <a:latin typeface="Verdana"/>
+              </a:rPr>
+              <a:t>À côté</a:t>
+            </a:r>
+            <a:r>
               <a:rPr sz="2000" b="0" i="0">
                 <a:solidFill>
                   <a:srgbClr val="4B4F52"/>
                 </a:solidFill>
                 <a:latin typeface="Verdana"/>
               </a:rPr>
-              <a:t>&lt;b&gt;À côté&lt;/b&gt;, c'est le même côté du corridor : les deux portes se touchent. &lt;b&gt;En face&lt;/b&gt;, c'est l'autre côté : il faut traverser. Montrez-le avec les deux mains, et la classe entière comprend en trois secondes.</a:t>
+              <a:t>, c'est le même côté du corridor : les deux portes se touchent. </a:t>
+            </a:r>
+            <a:r>
+              <a:rPr sz="2000" b="1" i="0">
+                <a:solidFill>
+                  <a:srgbClr val="4B4F52"/>
+                </a:solidFill>
+                <a:latin typeface="Verdana"/>
+              </a:rPr>
+              <a:t>En face</a:t>
+            </a:r>
+            <a:r>
+              <a:rPr sz="2000" b="0" i="0">
+                <a:solidFill>
+                  <a:srgbClr val="4B4F52"/>
+                </a:solidFill>
+                <a:latin typeface="Verdana"/>
+              </a:rPr>
+              <a:t>, c'est l'autre côté : il faut traverser. Montrez-le avec les deux mains, et la classe entière comprend en trois secondes.</a:t>
             </a:r>
           </a:p>
         </p:txBody>
@@ -11149,7 +11176,43 @@
                 </a:solidFill>
                 <a:latin typeface="Verdana"/>
               </a:rPr>
-              <a:t>Le petit mot &lt;b&gt;de&lt;/b&gt; n'est pas facultatif : sans lui, la phrase s'arrête au milieu et l'interlocuteur ne sait pas de quoi on parle. Même chose pour « en face &lt;b&gt;de&lt;/b&gt; l'ascenseur ».</a:t>
+              <a:t>Le petit mot </a:t>
+            </a:r>
+            <a:r>
+              <a:rPr sz="2000" b="1" i="0">
+                <a:solidFill>
+                  <a:srgbClr val="4B4F52"/>
+                </a:solidFill>
+                <a:latin typeface="Verdana"/>
+              </a:rPr>
+              <a:t>de</a:t>
+            </a:r>
+            <a:r>
+              <a:rPr sz="2000" b="0" i="0">
+                <a:solidFill>
+                  <a:srgbClr val="4B4F52"/>
+                </a:solidFill>
+                <a:latin typeface="Verdana"/>
+              </a:rPr>
+              <a:t> n'est pas facultatif : sans lui, la phrase s'arrête au milieu et l'interlocuteur ne sait pas de quoi on parle. Même chose pour « en face </a:t>
+            </a:r>
+            <a:r>
+              <a:rPr sz="2000" b="1" i="0">
+                <a:solidFill>
+                  <a:srgbClr val="4B4F52"/>
+                </a:solidFill>
+                <a:latin typeface="Verdana"/>
+              </a:rPr>
+              <a:t>de</a:t>
+            </a:r>
+            <a:r>
+              <a:rPr sz="2000" b="0" i="0">
+                <a:solidFill>
+                  <a:srgbClr val="4B4F52"/>
+                </a:solidFill>
+                <a:latin typeface="Verdana"/>
+              </a:rPr>
+              <a:t> l'ascenseur ».</a:t>
             </a:r>
           </a:p>
         </p:txBody>
